--- a/courseware/202609_ADS_W01_Overview_Platform_AI_Basics.pptx
+++ b/courseware/202609_ADS_W01_Overview_Platform_AI_Basics.pptx
@@ -5424,7 +5424,50 @@
                 <a:latin typeface="Segoe UI"/>
                 <a:ea typeface="微软雅黑"/>
               </a:rPr>
-              <a:t>·  上机考试是限时的：同样的思路，打字速度差一倍，能做完的题数就差两题</a:t>
+              <a:t>·  上机考试是限时的：</a:t>
+            </a:r>
+            <a:r>
+              <a:rPr sz="1639" b="1" i="0">
+                <a:solidFill>
+                  <a:srgbClr val="6B7582"/>
+                </a:solidFill>
+                <a:latin typeface="Segoe UI"/>
+                <a:ea typeface="微软雅黑"/>
+              </a:rPr>
+              <a:t>112 分钟 6 题</a:t>
+            </a:r>
+            <a:r>
+              <a:rPr sz="1639" b="0" i="0">
+                <a:solidFill>
+                  <a:srgbClr val="6B7582"/>
+                </a:solidFill>
+                <a:latin typeface="Segoe UI"/>
+                <a:ea typeface="微软雅黑"/>
+              </a:rPr>
+              <a:t>，平均一题不到 19 分钟</a:t>
+            </a:r>
+          </a:p>
+          <a:p>
+            <a:pPr algn="l" lvl="1">
+              <a:lnSpc>
+                <a:spcPct val="130000"/>
+              </a:lnSpc>
+              <a:spcBef>
+                <a:spcPts val="0"/>
+              </a:spcBef>
+              <a:spcAft>
+                <a:spcPts val="892"/>
+              </a:spcAft>
+            </a:pPr>
+            <a:r>
+              <a:rPr sz="1639" b="0" i="0">
+                <a:solidFill>
+                  <a:srgbClr val="6B7582"/>
+                </a:solidFill>
+                <a:latin typeface="Segoe UI"/>
+                <a:ea typeface="微软雅黑"/>
+              </a:rPr>
+              <a:t>·  同样的思路，打字速度差一倍，能做完的题数就差两题</a:t>
             </a:r>
           </a:p>
         </p:txBody>
@@ -16430,6 +16473,49 @@
                 <a:ea typeface="微软雅黑"/>
               </a:rPr>
               <a:t>，机考成绩对总评影响最大</a:t>
+            </a:r>
+          </a:p>
+          <a:p>
+            <a:pPr algn="l">
+              <a:lnSpc>
+                <a:spcPct val="132000"/>
+              </a:lnSpc>
+              <a:spcBef>
+                <a:spcPts val="0"/>
+              </a:spcBef>
+              <a:spcAft>
+                <a:spcPts val="1240"/>
+              </a:spcAft>
+            </a:pPr>
+            <a:r>
+              <a:rPr sz="2000" b="0" i="0">
+                <a:solidFill>
+                  <a:srgbClr val="242A33"/>
+                </a:solidFill>
+                <a:latin typeface="Segoe UI"/>
+                <a:ea typeface="微软雅黑"/>
+              </a:rPr>
+              <a:t>•  </a:t>
+            </a:r>
+            <a:r>
+              <a:rPr sz="2000" b="1" i="0">
+                <a:solidFill>
+                  <a:srgbClr val="12395B"/>
+                </a:solidFill>
+                <a:latin typeface="Segoe UI"/>
+                <a:ea typeface="微软雅黑"/>
+              </a:rPr>
+              <a:t>每一次机考都是 6 题 / 112 分钟</a:t>
+            </a:r>
+            <a:r>
+              <a:rPr sz="2000" b="0" i="0">
+                <a:solidFill>
+                  <a:srgbClr val="242A33"/>
+                </a:solidFill>
+                <a:latin typeface="Segoe UI"/>
+                <a:ea typeface="微软雅黑"/>
+              </a:rPr>
+              <a:t> —— 三次月考与期末同一规格</a:t>
             </a:r>
           </a:p>
           <a:p>
